--- a/dist/초2/수학/수와계산/초2_수학_수와계산_07_2단과5단.pptx
+++ b/dist/초2/수학/수와계산/초2_수학_수와계산_07_2단과5단.pptx
@@ -121,13 +121,13 @@
   <p:extLst>
     <p:ext uri="{521415D9-36F7-43E2-AB2F-B90AF26B5E84}">
       <p14:sectionLst xmlns:p14="http://schemas.microsoft.com/office/powerpoint/2010/main">
-        <p14:section name="도입" id="{f12dfd3d-3a4a-a1e7-88ee-0685de57d213}">
+        <p14:section name="도입" id="{38629d0d-01df-f61c-e4e6-7c8c9429e9a2}">
           <p14:sldIdLst>
             <p14:sldId id="256"/>
             <p14:sldId id="257"/>
           </p14:sldIdLst>
         </p14:section>
-        <p14:section name="개념" id="{bd89c414-dcd1-cbe6-5ce4-7d799192db8f}">
+        <p14:section name="개념" id="{9bd0c27f-e3f7-48a7-c089-234a32ec7587}">
           <p14:sldIdLst>
             <p14:sldId id="258"/>
             <p14:sldId id="259"/>
@@ -137,25 +137,25 @@
             <p14:sldId id="263"/>
           </p14:sldIdLst>
         </p14:section>
-        <p14:section name="연습" id="{f3d1f798-59c2-9f9e-4086-a49d2f06ae84}">
+        <p14:section name="연습" id="{dce52ac8-6ab2-f828-25ce-50ee5f3b864e}">
           <p14:sldIdLst>
             <p14:sldId id="264"/>
             <p14:sldId id="265"/>
           </p14:sldIdLst>
         </p14:section>
-        <p14:section name="확인" id="{f69d0df2-0281-4fbb-7db0-a54b07fd0b43}">
+        <p14:section name="확인" id="{efc07a30-648d-2818-2a38-56e063acf7a0}">
           <p14:sldIdLst>
             <p14:sldId id="266"/>
             <p14:sldId id="267"/>
             <p14:sldId id="268"/>
           </p14:sldIdLst>
         </p14:section>
-        <p14:section name="정리" id="{547c5513-c03d-18ea-5371-fef67ab01ae6}">
+        <p14:section name="정리" id="{79fb2178-6279-8cbf-575d-0e9b4e700979}">
           <p14:sldIdLst>
             <p14:sldId id="269"/>
           </p14:sldIdLst>
         </p14:section>
-        <p14:section name="보충" id="{71f4c6c5-bb46-c335-976a-44812af154e8}">
+        <p14:section name="보충" id="{f33c1b1d-c7b8-fa33-3928-11db7cc4c801}">
           <p14:sldIdLst>
             <p14:sldId id="270"/>
           </p14:sldIdLst>
@@ -1476,20 +1476,22 @@
           <a:p>
             <a:r>
               <a:rPr lang="en-US" dirty="0"/>
-              <a:t>[S04 · 수직선에서 2씩 뛰어 세기]
-목적: 수직선에서 2씩 뛰어 세어 곱을 구하고, 앞의 곱에 2를 더하면 다음 곱이 된다는 것을 압니다.
+              <a:t>[S04 · 수직선에서 2씩 뛰어 세기, ‘곱’이라는 말 알기]
+목적: 수직선에서 2씩 뛰어 세어 곱을 구하고, 곱셈의 결과를 ‘곱’이라고 부른다는 것과 앞의 곱에 2를 더하면 다음 곱이 된다는 것을 압니다.
 시간: 약 3분
 이렇게 말해 보세요
 - “2 × 6은 2씩 6번이야. 0에서 출발해서 2칸씩 뛰어 보자. 한 번 뛸 때마다 손가락을 하나씩 펴.”
-- “여섯 번 뛰었더니 어디에 왔어? 2 × 5는 10이었지? 2 × 6은 10보다 얼마 커?”
+- “곱셈을 해서 나온 수 12를 ‘곱’이라고 해. ‘2와 6의 곱은 12예요’라고 말해 볼래?”
+- “2 × 5는 10이었지? 2 × 6은 10보다 얼마 커?”
 예상 답
 - “2, 4, 6, 8, 10, 12. 12에 왔어요.”
-- “2 커요.”
+- “2와 6의 곱은 12예요.” “2 커요.”
 막히면
 - 종이 수직선 위에서 바둑돌 하나를 2칸씩 옮기며 뛴 횟수를 소리 내어 셉니다(“한 번, 두 번…”).
 - 10이나 14라고 하면 뛴 횟수를 손가락으로 다시 세게 합니다(M2).
 주의
 - 0은 출발점이라 세지 않습니다. 첫 번째로 닿는 곳이 2입니다.
+- ‘곱’이라는 말은 오늘 처음 씁니다(6차시 ‘곱셈의 뜻’에서는 쓰지 않았습니다). 이후 장에서 계속 쓰니 두세 번 함께 말해 봅니다.
 - ‘앞의 곱 + 2’는 중간 곱을 잊었을 때 다시 찾는 방법입니다(M3).</a:t>
             </a:r>
             <a:endParaRPr lang="en-US" dirty="0"/>
@@ -9901,7 +9903,7 @@
                 <a:ea typeface="맑은 고딕" pitchFamily="34" charset="-122"/>
                 <a:cs typeface="맑은 고딕" pitchFamily="34" charset="-120"/>
               </a:rPr>
-              <a:t>2 × 5 = 10보다 2 커요.</a:t>
+              <a:t>12는 2와 6의 ‘곱’이에요.</a:t>
             </a:r>
             <a:endParaRPr lang="ko-KR" sz="3200" dirty="0"/>
           </a:p>

--- a/dist/초2/수학/수와계산/초2_수학_수와계산_07_2단과5단.pptx
+++ b/dist/초2/수학/수와계산/초2_수학_수와계산_07_2단과5단.pptx
@@ -121,13 +121,13 @@
   <p:extLst>
     <p:ext uri="{521415D9-36F7-43E2-AB2F-B90AF26B5E84}">
       <p14:sectionLst xmlns:p14="http://schemas.microsoft.com/office/powerpoint/2010/main">
-        <p14:section name="도입" id="{38629d0d-01df-f61c-e4e6-7c8c9429e9a2}">
+        <p14:section name="도입" id="{9a50adfe-c233-c1fd-c52b-47c039effa56}">
           <p14:sldIdLst>
             <p14:sldId id="256"/>
             <p14:sldId id="257"/>
           </p14:sldIdLst>
         </p14:section>
-        <p14:section name="개념" id="{9bd0c27f-e3f7-48a7-c089-234a32ec7587}">
+        <p14:section name="개념" id="{0191199d-e8dc-4a35-7551-cff46befe9eb}">
           <p14:sldIdLst>
             <p14:sldId id="258"/>
             <p14:sldId id="259"/>
@@ -137,25 +137,25 @@
             <p14:sldId id="263"/>
           </p14:sldIdLst>
         </p14:section>
-        <p14:section name="연습" id="{dce52ac8-6ab2-f828-25ce-50ee5f3b864e}">
+        <p14:section name="연습" id="{ee7e8ef2-f49a-4573-bf17-0d129e93e2b9}">
           <p14:sldIdLst>
             <p14:sldId id="264"/>
             <p14:sldId id="265"/>
           </p14:sldIdLst>
         </p14:section>
-        <p14:section name="확인" id="{efc07a30-648d-2818-2a38-56e063acf7a0}">
+        <p14:section name="확인" id="{7b01c9a5-5302-9d83-fc5c-158686c54a63}">
           <p14:sldIdLst>
             <p14:sldId id="266"/>
             <p14:sldId id="267"/>
             <p14:sldId id="268"/>
           </p14:sldIdLst>
         </p14:section>
-        <p14:section name="정리" id="{79fb2178-6279-8cbf-575d-0e9b4e700979}">
+        <p14:section name="정리" id="{4581a76f-848f-9cc5-5c03-96a5e49768b6}">
           <p14:sldIdLst>
             <p14:sldId id="269"/>
           </p14:sldIdLst>
         </p14:section>
-        <p14:section name="보충" id="{f33c1b1d-c7b8-fa33-3928-11db7cc4c801}">
+        <p14:section name="보충" id="{2de9f939-ba32-d80a-1fc9-6c9b8ddb716b}">
           <p14:sldIdLst>
             <p14:sldId id="270"/>
           </p14:sldIdLst>
@@ -7783,7 +7783,7 @@
         </p:nvSpPr>
         <p:spPr>
           <a:xfrm>
-            <a:off x="2674925" y="2092757"/>
+            <a:off x="3315005" y="2092757"/>
             <a:ext cx="264566" cy="264566"/>
           </a:xfrm>
           <a:prstGeom prst="ellipse">
@@ -7808,7 +7808,7 @@
         </p:nvSpPr>
         <p:spPr>
           <a:xfrm>
-            <a:off x="3101645" y="2092757"/>
+            <a:off x="3741725" y="2092757"/>
             <a:ext cx="264566" cy="264566"/>
           </a:xfrm>
           <a:prstGeom prst="ellipse">
@@ -7833,7 +7833,7 @@
         </p:nvSpPr>
         <p:spPr>
           <a:xfrm>
-            <a:off x="3528365" y="2092757"/>
+            <a:off x="4168445" y="2092757"/>
             <a:ext cx="264566" cy="264566"/>
           </a:xfrm>
           <a:prstGeom prst="ellipse">
@@ -7858,7 +7858,7 @@
         </p:nvSpPr>
         <p:spPr>
           <a:xfrm>
-            <a:off x="3955085" y="2092757"/>
+            <a:off x="4595165" y="2092757"/>
             <a:ext cx="264566" cy="264566"/>
           </a:xfrm>
           <a:prstGeom prst="ellipse">
@@ -7883,7 +7883,7 @@
         </p:nvSpPr>
         <p:spPr>
           <a:xfrm>
-            <a:off x="2674925" y="2519477"/>
+            <a:off x="3315005" y="2519477"/>
             <a:ext cx="264566" cy="264566"/>
           </a:xfrm>
           <a:prstGeom prst="ellipse">
@@ -7908,7 +7908,7 @@
         </p:nvSpPr>
         <p:spPr>
           <a:xfrm>
-            <a:off x="3101645" y="2519477"/>
+            <a:off x="3741725" y="2519477"/>
             <a:ext cx="264566" cy="264566"/>
           </a:xfrm>
           <a:prstGeom prst="ellipse">
@@ -7933,7 +7933,7 @@
         </p:nvSpPr>
         <p:spPr>
           <a:xfrm>
-            <a:off x="3528365" y="2519477"/>
+            <a:off x="4168445" y="2519477"/>
             <a:ext cx="264566" cy="264566"/>
           </a:xfrm>
           <a:prstGeom prst="ellipse">
@@ -7958,7 +7958,7 @@
         </p:nvSpPr>
         <p:spPr>
           <a:xfrm>
-            <a:off x="3955085" y="2519477"/>
+            <a:off x="4595165" y="2519477"/>
             <a:ext cx="264566" cy="264566"/>
           </a:xfrm>
           <a:prstGeom prst="ellipse">
@@ -7983,7 +7983,7 @@
         </p:nvSpPr>
         <p:spPr>
           <a:xfrm>
-            <a:off x="2674925" y="2946197"/>
+            <a:off x="3315005" y="2946197"/>
             <a:ext cx="264566" cy="264566"/>
           </a:xfrm>
           <a:prstGeom prst="ellipse">
@@ -8008,7 +8008,7 @@
         </p:nvSpPr>
         <p:spPr>
           <a:xfrm>
-            <a:off x="3101645" y="2946197"/>
+            <a:off x="3741725" y="2946197"/>
             <a:ext cx="264566" cy="264566"/>
           </a:xfrm>
           <a:prstGeom prst="ellipse">
@@ -8033,7 +8033,7 @@
         </p:nvSpPr>
         <p:spPr>
           <a:xfrm>
-            <a:off x="3528365" y="2946197"/>
+            <a:off x="4168445" y="2946197"/>
             <a:ext cx="264566" cy="264566"/>
           </a:xfrm>
           <a:prstGeom prst="ellipse">
@@ -8058,7 +8058,7 @@
         </p:nvSpPr>
         <p:spPr>
           <a:xfrm>
-            <a:off x="3955085" y="2946197"/>
+            <a:off x="4595165" y="2946197"/>
             <a:ext cx="264566" cy="264566"/>
           </a:xfrm>
           <a:prstGeom prst="ellipse">
@@ -8083,7 +8083,7 @@
         </p:nvSpPr>
         <p:spPr>
           <a:xfrm>
-            <a:off x="2621280" y="2048256"/>
+            <a:off x="3261360" y="2048256"/>
             <a:ext cx="1652016" cy="353568"/>
           </a:xfrm>
           <a:prstGeom prst="roundRect">
@@ -8112,7 +8112,7 @@
         </p:nvSpPr>
         <p:spPr>
           <a:xfrm>
-            <a:off x="2621280" y="2474976"/>
+            <a:off x="3261360" y="2474976"/>
             <a:ext cx="1652016" cy="353568"/>
           </a:xfrm>
           <a:prstGeom prst="roundRect">
@@ -8141,7 +8141,7 @@
         </p:nvSpPr>
         <p:spPr>
           <a:xfrm>
-            <a:off x="2621280" y="2901696"/>
+            <a:off x="3261360" y="2901696"/>
             <a:ext cx="1652016" cy="353568"/>
           </a:xfrm>
           <a:prstGeom prst="roundRect">
@@ -8170,7 +8170,7 @@
         </p:nvSpPr>
         <p:spPr>
           <a:xfrm>
-            <a:off x="2593848" y="2011680"/>
+            <a:off x="3233928" y="2011680"/>
             <a:ext cx="1706880" cy="1280160"/>
           </a:xfrm>
           <a:prstGeom prst="rect">
@@ -11919,7 +11919,7 @@
           </p:nvPr>
         </p:nvGraphicFramePr>
         <p:xfrm>
-          <a:off x="548640" y="3037840"/>
+          <a:off x="548640" y="3054350"/>
           <a:ext cx="11091672" cy="914400"/>
         </p:xfrm>
         <a:graphic>
@@ -11937,7 +11937,7 @@
                 <a:gridCol w="1232408"/>
                 <a:gridCol w="1232408"/>
               </a:tblGrid>
-              <a:tr h="528320">
+              <a:tr h="511810">
                 <a:tc>
                   <a:txBody>
                     <a:bodyPr/>
@@ -12551,7 +12551,7 @@
                   </a:tcPr>
                 </a:tc>
               </a:tr>
-              <a:tr h="528320">
+              <a:tr h="511810">
                 <a:tc>
                   <a:txBody>
                     <a:bodyPr/>
@@ -17003,7 +17003,7 @@
           </p:nvPr>
         </p:nvGraphicFramePr>
         <p:xfrm>
-          <a:off x="548640" y="3037840"/>
+          <a:off x="548640" y="3054350"/>
           <a:ext cx="11091672" cy="914400"/>
         </p:xfrm>
         <a:graphic>
@@ -17021,7 +17021,7 @@
                 <a:gridCol w="1232408"/>
                 <a:gridCol w="1232408"/>
               </a:tblGrid>
-              <a:tr h="528320">
+              <a:tr h="511810">
                 <a:tc>
                   <a:txBody>
                     <a:bodyPr/>
@@ -17635,7 +17635,7 @@
                   </a:tcPr>
                 </a:tc>
               </a:tr>
-              <a:tr h="528320">
+              <a:tr h="511810">
                 <a:tc>
                   <a:txBody>
                     <a:bodyPr/>
